--- a/ToxPipe API Guide.pptx
+++ b/ToxPipe API Guide.pptx
@@ -113,6 +113,11 @@
       </a:defRPr>
     </a:lvl9pPr>
   </p:defaultTextStyle>
+  <p:extLst>
+    <p:ext uri="{EFAFB233-063F-42B5-8137-9DF3F51BA10A}">
+      <p15:sldGuideLst xmlns:p15="http://schemas.microsoft.com/office/powerpoint/2012/main"/>
+    </p:ext>
+  </p:extLst>
 </p:presentation>
 </file>
 
@@ -4454,8 +4459,13 @@
             </a:r>
             <a:r>
               <a:rPr lang="en-US" sz="1400" dirty="0"/>
-              <a:t> – The maximum number of agentic steps (“thoughts”) the agent may take. Currently unsupported, will be added in a later update.</a:t>
-            </a:r>
+              <a:t> – The maximum number of agentic steps (“thoughts”) the agent may take. If an agent exceeds this number of steps, it will return with </a:t>
+            </a:r>
+            <a:r>
+              <a:rPr lang="en-US" sz="1400"/>
+              <a:t>an error.</a:t>
+            </a:r>
+            <a:endParaRPr lang="en-US" sz="1400" dirty="0"/>
           </a:p>
           <a:p>
             <a:pPr lvl="2">

--- a/ToxPipe API Guide.pptx
+++ b/ToxPipe API Guide.pptx
@@ -268,7 +268,7 @@
           <a:p>
             <a:fld id="{2887AE02-B111-4481-B2BD-B82CAADB2540}" type="datetimeFigureOut">
               <a:rPr lang="en-US" smtClean="0"/>
-              <a:t>12/4/2024</a:t>
+              <a:t>12/5/2024</a:t>
             </a:fld>
             <a:endParaRPr lang="en-US"/>
           </a:p>
@@ -466,7 +466,7 @@
           <a:p>
             <a:fld id="{2887AE02-B111-4481-B2BD-B82CAADB2540}" type="datetimeFigureOut">
               <a:rPr lang="en-US" smtClean="0"/>
-              <a:t>12/4/2024</a:t>
+              <a:t>12/5/2024</a:t>
             </a:fld>
             <a:endParaRPr lang="en-US"/>
           </a:p>
@@ -674,7 +674,7 @@
           <a:p>
             <a:fld id="{2887AE02-B111-4481-B2BD-B82CAADB2540}" type="datetimeFigureOut">
               <a:rPr lang="en-US" smtClean="0"/>
-              <a:t>12/4/2024</a:t>
+              <a:t>12/5/2024</a:t>
             </a:fld>
             <a:endParaRPr lang="en-US"/>
           </a:p>
@@ -872,7 +872,7 @@
           <a:p>
             <a:fld id="{2887AE02-B111-4481-B2BD-B82CAADB2540}" type="datetimeFigureOut">
               <a:rPr lang="en-US" smtClean="0"/>
-              <a:t>12/4/2024</a:t>
+              <a:t>12/5/2024</a:t>
             </a:fld>
             <a:endParaRPr lang="en-US"/>
           </a:p>
@@ -1147,7 +1147,7 @@
           <a:p>
             <a:fld id="{2887AE02-B111-4481-B2BD-B82CAADB2540}" type="datetimeFigureOut">
               <a:rPr lang="en-US" smtClean="0"/>
-              <a:t>12/4/2024</a:t>
+              <a:t>12/5/2024</a:t>
             </a:fld>
             <a:endParaRPr lang="en-US"/>
           </a:p>
@@ -1412,7 +1412,7 @@
           <a:p>
             <a:fld id="{2887AE02-B111-4481-B2BD-B82CAADB2540}" type="datetimeFigureOut">
               <a:rPr lang="en-US" smtClean="0"/>
-              <a:t>12/4/2024</a:t>
+              <a:t>12/5/2024</a:t>
             </a:fld>
             <a:endParaRPr lang="en-US"/>
           </a:p>
@@ -1824,7 +1824,7 @@
           <a:p>
             <a:fld id="{2887AE02-B111-4481-B2BD-B82CAADB2540}" type="datetimeFigureOut">
               <a:rPr lang="en-US" smtClean="0"/>
-              <a:t>12/4/2024</a:t>
+              <a:t>12/5/2024</a:t>
             </a:fld>
             <a:endParaRPr lang="en-US"/>
           </a:p>
@@ -1965,7 +1965,7 @@
           <a:p>
             <a:fld id="{2887AE02-B111-4481-B2BD-B82CAADB2540}" type="datetimeFigureOut">
               <a:rPr lang="en-US" smtClean="0"/>
-              <a:t>12/4/2024</a:t>
+              <a:t>12/5/2024</a:t>
             </a:fld>
             <a:endParaRPr lang="en-US"/>
           </a:p>
@@ -2078,7 +2078,7 @@
           <a:p>
             <a:fld id="{2887AE02-B111-4481-B2BD-B82CAADB2540}" type="datetimeFigureOut">
               <a:rPr lang="en-US" smtClean="0"/>
-              <a:t>12/4/2024</a:t>
+              <a:t>12/5/2024</a:t>
             </a:fld>
             <a:endParaRPr lang="en-US"/>
           </a:p>
@@ -2389,7 +2389,7 @@
           <a:p>
             <a:fld id="{2887AE02-B111-4481-B2BD-B82CAADB2540}" type="datetimeFigureOut">
               <a:rPr lang="en-US" smtClean="0"/>
-              <a:t>12/4/2024</a:t>
+              <a:t>12/5/2024</a:t>
             </a:fld>
             <a:endParaRPr lang="en-US"/>
           </a:p>
@@ -2677,7 +2677,7 @@
           <a:p>
             <a:fld id="{2887AE02-B111-4481-B2BD-B82CAADB2540}" type="datetimeFigureOut">
               <a:rPr lang="en-US" smtClean="0"/>
-              <a:t>12/4/2024</a:t>
+              <a:t>12/5/2024</a:t>
             </a:fld>
             <a:endParaRPr lang="en-US"/>
           </a:p>
@@ -2918,7 +2918,7 @@
           <a:p>
             <a:fld id="{2887AE02-B111-4481-B2BD-B82CAADB2540}" type="datetimeFigureOut">
               <a:rPr lang="en-US" smtClean="0"/>
-              <a:t>12/4/2024</a:t>
+              <a:t>12/5/2024</a:t>
             </a:fld>
             <a:endParaRPr lang="en-US"/>
           </a:p>
@@ -3390,7 +3390,7 @@
           <a:p>
             <a:r>
               <a:rPr lang="en-US" dirty="0"/>
-              <a:t>Last Updated: Dec. 4, 2024</a:t>
+              <a:t>Last Updated: Dec. 5, 2024</a:t>
             </a:r>
           </a:p>
         </p:txBody>
@@ -4322,7 +4322,7 @@
         </p:spPr>
         <p:txBody>
           <a:bodyPr>
-            <a:normAutofit fontScale="92500" lnSpcReduction="10000"/>
+            <a:normAutofit fontScale="92500" lnSpcReduction="20000"/>
           </a:bodyPr>
           <a:lstStyle/>
           <a:p>
@@ -4459,13 +4459,25 @@
             </a:r>
             <a:r>
               <a:rPr lang="en-US" sz="1400" dirty="0"/>
-              <a:t> – The maximum number of agentic steps (“thoughts”) the agent may take. If an agent exceeds this number of steps, it will return with </a:t>
-            </a:r>
-            <a:r>
-              <a:rPr lang="en-US" sz="1400"/>
-              <a:t>an error.</a:t>
-            </a:r>
-            <a:endParaRPr lang="en-US" sz="1400" dirty="0"/>
+              <a:t> – The maximum number of agentic steps (“thoughts”) the agent may take. If an agent exceeds this number of steps, it will return with an error.</a:t>
+            </a:r>
+          </a:p>
+          <a:p>
+            <a:pPr lvl="2">
+              <a:tabLst>
+                <a:tab pos="5257800" algn="l"/>
+              </a:tabLst>
+            </a:pPr>
+            <a:r>
+              <a:rPr lang="en-US" sz="1400" b="1" dirty="0" err="1">
+                <a:latin typeface="Consolas" panose="020B0609020204030204" pitchFamily="49" charset="0"/>
+              </a:rPr>
+              <a:t>step_timeout</a:t>
+            </a:r>
+            <a:r>
+              <a:rPr lang="en-US" sz="1400" dirty="0"/>
+              <a:t> – The maximum time in seconds that an agent may spend on a single step. If an agent exceeds this time, it will return with an error.</a:t>
+            </a:r>
           </a:p>
           <a:p>
             <a:pPr lvl="2">
@@ -4753,7 +4765,7 @@
         </p:blipFill>
         <p:spPr>
           <a:xfrm>
-            <a:off x="4556227" y="1596967"/>
+            <a:off x="4544195" y="1615014"/>
             <a:ext cx="1224133" cy="314369"/>
           </a:xfrm>
           <a:prstGeom prst="rect">
@@ -4783,7 +4795,7 @@
         </p:blipFill>
         <p:spPr>
           <a:xfrm>
-            <a:off x="4459973" y="5363314"/>
+            <a:off x="4496067" y="5309172"/>
             <a:ext cx="1151580" cy="234139"/>
           </a:xfrm>
           <a:prstGeom prst="rect">
@@ -5509,44 +5521,12 @@
           <a:chExt cx="0" cy="0"/>
         </a:xfrm>
       </p:grpSpPr>
-      <p:sp>
-        <p:nvSpPr>
-          <p:cNvPr id="2" name="Title 1">
-            <a:extLst>
-              <a:ext uri="{FF2B5EF4-FFF2-40B4-BE49-F238E27FC236}">
-                <a16:creationId xmlns:a16="http://schemas.microsoft.com/office/drawing/2014/main" id="{B728E865-4E61-6D9D-E688-3FEFE59B58EA}"/>
-              </a:ext>
-            </a:extLst>
-          </p:cNvPr>
-          <p:cNvSpPr>
-            <a:spLocks noGrp="1"/>
-          </p:cNvSpPr>
-          <p:nvPr>
-            <p:ph type="title"/>
-          </p:nvPr>
-        </p:nvSpPr>
-        <p:spPr/>
-        <p:txBody>
-          <a:bodyPr/>
-          <a:lstStyle/>
-          <a:p>
-            <a:r>
-              <a:rPr lang="en-US" dirty="0" err="1"/>
-              <a:t>Quickstart</a:t>
-            </a:r>
-            <a:r>
-              <a:rPr lang="en-US" dirty="0"/>
-              <a:t> - 1</a:t>
-            </a:r>
-          </a:p>
-        </p:txBody>
-      </p:sp>
       <p:pic>
         <p:nvPicPr>
-          <p:cNvPr id="5" name="Picture 4">
-            <a:extLst>
-              <a:ext uri="{FF2B5EF4-FFF2-40B4-BE49-F238E27FC236}">
-                <a16:creationId xmlns:a16="http://schemas.microsoft.com/office/drawing/2014/main" id="{208C5D4C-6AAD-1D52-BBBD-A5DB2E418F51}"/>
+          <p:cNvPr id="4" name="Picture 3">
+            <a:extLst>
+              <a:ext uri="{FF2B5EF4-FFF2-40B4-BE49-F238E27FC236}">
+                <a16:creationId xmlns:a16="http://schemas.microsoft.com/office/drawing/2014/main" id="{336FE4BD-01EC-0428-C393-C237703813AD}"/>
               </a:ext>
             </a:extLst>
           </p:cNvPr>
@@ -5563,14 +5543,46 @@
         </p:blipFill>
         <p:spPr>
           <a:xfrm>
-            <a:off x="1671852" y="1269640"/>
-            <a:ext cx="9069277" cy="5486001"/>
+            <a:off x="1672389" y="1221397"/>
+            <a:ext cx="9603205" cy="4743422"/>
           </a:xfrm>
           <a:prstGeom prst="rect">
             <a:avLst/>
           </a:prstGeom>
         </p:spPr>
       </p:pic>
+      <p:sp>
+        <p:nvSpPr>
+          <p:cNvPr id="2" name="Title 1">
+            <a:extLst>
+              <a:ext uri="{FF2B5EF4-FFF2-40B4-BE49-F238E27FC236}">
+                <a16:creationId xmlns:a16="http://schemas.microsoft.com/office/drawing/2014/main" id="{B728E865-4E61-6D9D-E688-3FEFE59B58EA}"/>
+              </a:ext>
+            </a:extLst>
+          </p:cNvPr>
+          <p:cNvSpPr>
+            <a:spLocks noGrp="1"/>
+          </p:cNvSpPr>
+          <p:nvPr>
+            <p:ph type="title"/>
+          </p:nvPr>
+        </p:nvSpPr>
+        <p:spPr/>
+        <p:txBody>
+          <a:bodyPr/>
+          <a:lstStyle/>
+          <a:p>
+            <a:r>
+              <a:rPr lang="en-US" dirty="0" err="1"/>
+              <a:t>Quickstart</a:t>
+            </a:r>
+            <a:r>
+              <a:rPr lang="en-US" dirty="0"/>
+              <a:t> - 1</a:t>
+            </a:r>
+          </a:p>
+        </p:txBody>
+      </p:sp>
       <p:sp>
         <p:nvSpPr>
           <p:cNvPr id="6" name="Rectangle 5">
@@ -5682,7 +5694,7 @@
         </p:nvSpPr>
         <p:spPr>
           <a:xfrm>
-            <a:off x="3533775" y="4805363"/>
+            <a:off x="6004884" y="5521998"/>
             <a:ext cx="938213" cy="347303"/>
           </a:xfrm>
           <a:prstGeom prst="rect">
@@ -5785,44 +5797,12 @@
           <a:chExt cx="0" cy="0"/>
         </a:xfrm>
       </p:grpSpPr>
-      <p:sp>
-        <p:nvSpPr>
-          <p:cNvPr id="2" name="Title 1">
-            <a:extLst>
-              <a:ext uri="{FF2B5EF4-FFF2-40B4-BE49-F238E27FC236}">
-                <a16:creationId xmlns:a16="http://schemas.microsoft.com/office/drawing/2014/main" id="{B728E865-4E61-6D9D-E688-3FEFE59B58EA}"/>
-              </a:ext>
-            </a:extLst>
-          </p:cNvPr>
-          <p:cNvSpPr>
-            <a:spLocks noGrp="1"/>
-          </p:cNvSpPr>
-          <p:nvPr>
-            <p:ph type="title"/>
-          </p:nvPr>
-        </p:nvSpPr>
-        <p:spPr/>
-        <p:txBody>
-          <a:bodyPr/>
-          <a:lstStyle/>
-          <a:p>
-            <a:r>
-              <a:rPr lang="en-US" dirty="0" err="1"/>
-              <a:t>Quickstart</a:t>
-            </a:r>
-            <a:r>
-              <a:rPr lang="en-US" dirty="0"/>
-              <a:t> - 2</a:t>
-            </a:r>
-          </a:p>
-        </p:txBody>
-      </p:sp>
       <p:pic>
         <p:nvPicPr>
-          <p:cNvPr id="4" name="Picture 3">
-            <a:extLst>
-              <a:ext uri="{FF2B5EF4-FFF2-40B4-BE49-F238E27FC236}">
-                <a16:creationId xmlns:a16="http://schemas.microsoft.com/office/drawing/2014/main" id="{5933926B-D139-8892-8F5F-B8DBDA3DF22E}"/>
+          <p:cNvPr id="11" name="Picture 10">
+            <a:extLst>
+              <a:ext uri="{FF2B5EF4-FFF2-40B4-BE49-F238E27FC236}">
+                <a16:creationId xmlns:a16="http://schemas.microsoft.com/office/drawing/2014/main" id="{43D274A9-B7EB-1924-456F-86278299995C}"/>
               </a:ext>
             </a:extLst>
           </p:cNvPr>
@@ -5839,8 +5819,8 @@
         </p:blipFill>
         <p:spPr>
           <a:xfrm>
-            <a:off x="0" y="1330568"/>
-            <a:ext cx="8677530" cy="2190554"/>
+            <a:off x="3015703" y="3708639"/>
+            <a:ext cx="8453658" cy="2440720"/>
           </a:xfrm>
           <a:prstGeom prst="rect">
             <a:avLst/>
@@ -5849,10 +5829,10 @@
       </p:pic>
       <p:pic>
         <p:nvPicPr>
-          <p:cNvPr id="5" name="Picture 4">
-            <a:extLst>
-              <a:ext uri="{FF2B5EF4-FFF2-40B4-BE49-F238E27FC236}">
-                <a16:creationId xmlns:a16="http://schemas.microsoft.com/office/drawing/2014/main" id="{92FD0CEB-03DB-08BE-7956-D1AA653754EB}"/>
+          <p:cNvPr id="8" name="Picture 7">
+            <a:extLst>
+              <a:ext uri="{FF2B5EF4-FFF2-40B4-BE49-F238E27FC236}">
+                <a16:creationId xmlns:a16="http://schemas.microsoft.com/office/drawing/2014/main" id="{DDE5CE38-FE74-234F-B4A0-A000680BF8C8}"/>
               </a:ext>
             </a:extLst>
           </p:cNvPr>
@@ -5869,14 +5849,46 @@
         </p:blipFill>
         <p:spPr>
           <a:xfrm>
-            <a:off x="2852381" y="3635202"/>
-            <a:ext cx="9189493" cy="2857673"/>
+            <a:off x="0" y="1333986"/>
+            <a:ext cx="8808448" cy="2178297"/>
           </a:xfrm>
           <a:prstGeom prst="rect">
             <a:avLst/>
           </a:prstGeom>
         </p:spPr>
       </p:pic>
+      <p:sp>
+        <p:nvSpPr>
+          <p:cNvPr id="2" name="Title 1">
+            <a:extLst>
+              <a:ext uri="{FF2B5EF4-FFF2-40B4-BE49-F238E27FC236}">
+                <a16:creationId xmlns:a16="http://schemas.microsoft.com/office/drawing/2014/main" id="{B728E865-4E61-6D9D-E688-3FEFE59B58EA}"/>
+              </a:ext>
+            </a:extLst>
+          </p:cNvPr>
+          <p:cNvSpPr>
+            <a:spLocks noGrp="1"/>
+          </p:cNvSpPr>
+          <p:nvPr>
+            <p:ph type="title"/>
+          </p:nvPr>
+        </p:nvSpPr>
+        <p:spPr/>
+        <p:txBody>
+          <a:bodyPr/>
+          <a:lstStyle/>
+          <a:p>
+            <a:r>
+              <a:rPr lang="en-US" dirty="0" err="1"/>
+              <a:t>Quickstart</a:t>
+            </a:r>
+            <a:r>
+              <a:rPr lang="en-US" dirty="0"/>
+              <a:t> - 2</a:t>
+            </a:r>
+          </a:p>
+        </p:txBody>
+      </p:sp>
       <p:sp>
         <p:nvSpPr>
           <p:cNvPr id="6" name="Rectangle 5">

--- a/ToxPipe API Guide.pptx
+++ b/ToxPipe API Guide.pptx
@@ -268,7 +268,7 @@
           <a:p>
             <a:fld id="{2887AE02-B111-4481-B2BD-B82CAADB2540}" type="datetimeFigureOut">
               <a:rPr lang="en-US" smtClean="0"/>
-              <a:t>12/5/2024</a:t>
+              <a:t>12/12/2024</a:t>
             </a:fld>
             <a:endParaRPr lang="en-US"/>
           </a:p>
@@ -466,7 +466,7 @@
           <a:p>
             <a:fld id="{2887AE02-B111-4481-B2BD-B82CAADB2540}" type="datetimeFigureOut">
               <a:rPr lang="en-US" smtClean="0"/>
-              <a:t>12/5/2024</a:t>
+              <a:t>12/12/2024</a:t>
             </a:fld>
             <a:endParaRPr lang="en-US"/>
           </a:p>
@@ -674,7 +674,7 @@
           <a:p>
             <a:fld id="{2887AE02-B111-4481-B2BD-B82CAADB2540}" type="datetimeFigureOut">
               <a:rPr lang="en-US" smtClean="0"/>
-              <a:t>12/5/2024</a:t>
+              <a:t>12/12/2024</a:t>
             </a:fld>
             <a:endParaRPr lang="en-US"/>
           </a:p>
@@ -872,7 +872,7 @@
           <a:p>
             <a:fld id="{2887AE02-B111-4481-B2BD-B82CAADB2540}" type="datetimeFigureOut">
               <a:rPr lang="en-US" smtClean="0"/>
-              <a:t>12/5/2024</a:t>
+              <a:t>12/12/2024</a:t>
             </a:fld>
             <a:endParaRPr lang="en-US"/>
           </a:p>
@@ -1147,7 +1147,7 @@
           <a:p>
             <a:fld id="{2887AE02-B111-4481-B2BD-B82CAADB2540}" type="datetimeFigureOut">
               <a:rPr lang="en-US" smtClean="0"/>
-              <a:t>12/5/2024</a:t>
+              <a:t>12/12/2024</a:t>
             </a:fld>
             <a:endParaRPr lang="en-US"/>
           </a:p>
@@ -1412,7 +1412,7 @@
           <a:p>
             <a:fld id="{2887AE02-B111-4481-B2BD-B82CAADB2540}" type="datetimeFigureOut">
               <a:rPr lang="en-US" smtClean="0"/>
-              <a:t>12/5/2024</a:t>
+              <a:t>12/12/2024</a:t>
             </a:fld>
             <a:endParaRPr lang="en-US"/>
           </a:p>
@@ -1824,7 +1824,7 @@
           <a:p>
             <a:fld id="{2887AE02-B111-4481-B2BD-B82CAADB2540}" type="datetimeFigureOut">
               <a:rPr lang="en-US" smtClean="0"/>
-              <a:t>12/5/2024</a:t>
+              <a:t>12/12/2024</a:t>
             </a:fld>
             <a:endParaRPr lang="en-US"/>
           </a:p>
@@ -1965,7 +1965,7 @@
           <a:p>
             <a:fld id="{2887AE02-B111-4481-B2BD-B82CAADB2540}" type="datetimeFigureOut">
               <a:rPr lang="en-US" smtClean="0"/>
-              <a:t>12/5/2024</a:t>
+              <a:t>12/12/2024</a:t>
             </a:fld>
             <a:endParaRPr lang="en-US"/>
           </a:p>
@@ -2078,7 +2078,7 @@
           <a:p>
             <a:fld id="{2887AE02-B111-4481-B2BD-B82CAADB2540}" type="datetimeFigureOut">
               <a:rPr lang="en-US" smtClean="0"/>
-              <a:t>12/5/2024</a:t>
+              <a:t>12/12/2024</a:t>
             </a:fld>
             <a:endParaRPr lang="en-US"/>
           </a:p>
@@ -2389,7 +2389,7 @@
           <a:p>
             <a:fld id="{2887AE02-B111-4481-B2BD-B82CAADB2540}" type="datetimeFigureOut">
               <a:rPr lang="en-US" smtClean="0"/>
-              <a:t>12/5/2024</a:t>
+              <a:t>12/12/2024</a:t>
             </a:fld>
             <a:endParaRPr lang="en-US"/>
           </a:p>
@@ -2677,7 +2677,7 @@
           <a:p>
             <a:fld id="{2887AE02-B111-4481-B2BD-B82CAADB2540}" type="datetimeFigureOut">
               <a:rPr lang="en-US" smtClean="0"/>
-              <a:t>12/5/2024</a:t>
+              <a:t>12/12/2024</a:t>
             </a:fld>
             <a:endParaRPr lang="en-US"/>
           </a:p>
@@ -2918,7 +2918,7 @@
           <a:p>
             <a:fld id="{2887AE02-B111-4481-B2BD-B82CAADB2540}" type="datetimeFigureOut">
               <a:rPr lang="en-US" smtClean="0"/>
-              <a:t>12/5/2024</a:t>
+              <a:t>12/12/2024</a:t>
             </a:fld>
             <a:endParaRPr lang="en-US"/>
           </a:p>
@@ -3390,7 +3390,7 @@
           <a:p>
             <a:r>
               <a:rPr lang="en-US" dirty="0"/>
-              <a:t>Last Updated: Dec. 5, 2024</a:t>
+              <a:t>Last Updated: Dec. 12, 2024</a:t>
             </a:r>
           </a:p>
         </p:txBody>
@@ -5259,6 +5259,24 @@
               </a:rPr>
               <a:t>MistralAI</a:t>
             </a:r>
+            <a:r>
+              <a:rPr lang="en-US" sz="1200" b="1" dirty="0">
+                <a:effectLst/>
+              </a:rPr>
+              <a:t> </a:t>
+            </a:r>
+            <a:r>
+              <a:rPr lang="en-US" sz="1200" b="0" dirty="0">
+                <a:effectLst/>
+              </a:rPr>
+              <a:t>(not fully supported – tools occasionally work, but the models are prone to hallucination. These may </a:t>
+            </a:r>
+            <a:r>
+              <a:rPr lang="en-US" sz="1200" b="0">
+                <a:effectLst/>
+              </a:rPr>
+              <a:t>also fail to take multiple agentic steps.)</a:t>
+            </a:r>
             <a:endParaRPr lang="en-US" sz="1200" b="1" dirty="0">
               <a:effectLst/>
             </a:endParaRPr>
@@ -5291,9 +5309,6 @@
             </a:pPr>
             <a:r>
               <a:rPr lang="en-US" sz="1200" b="0" dirty="0">
-                <a:solidFill>
-                  <a:srgbClr val="FF0000"/>
-                </a:solidFill>
                 <a:effectLst/>
                 <a:latin typeface="Consolas" panose="020B0609020204030204" pitchFamily="49" charset="0"/>
               </a:rPr>
@@ -5311,9 +5326,6 @@
             </a:pPr>
             <a:r>
               <a:rPr lang="en-US" sz="1200" b="0" dirty="0">
-                <a:solidFill>
-                  <a:srgbClr val="FF0000"/>
-                </a:solidFill>
                 <a:effectLst/>
                 <a:latin typeface="Consolas" panose="020B0609020204030204" pitchFamily="49" charset="0"/>
               </a:rPr>

--- a/ToxPipe API Guide.pptx
+++ b/ToxPipe API Guide.pptx
@@ -5269,13 +5269,7 @@
               <a:rPr lang="en-US" sz="1200" b="0" dirty="0">
                 <a:effectLst/>
               </a:rPr>
-              <a:t>(not fully supported – tools occasionally work, but the models are prone to hallucination. These may </a:t>
-            </a:r>
-            <a:r>
-              <a:rPr lang="en-US" sz="1200" b="0">
-                <a:effectLst/>
-              </a:rPr>
-              <a:t>also fail to take multiple agentic steps.)</a:t>
+              <a:t>(not fully supported – tools occasionally work, but the models are prone to hallucination. These may also fail to take multiple agentic steps.)</a:t>
             </a:r>
             <a:endParaRPr lang="en-US" sz="1200" b="1" dirty="0">
               <a:effectLst/>
@@ -5362,8 +5356,23 @@
               <a:rPr lang="en-US" sz="1200" b="1" dirty="0">
                 <a:effectLst/>
               </a:rPr>
-              <a:t>Amazon</a:t>
-            </a:r>
+              <a:t>Amazon </a:t>
+            </a:r>
+            <a:r>
+              <a:rPr lang="en-US" sz="1200" dirty="0">
+                <a:effectLst/>
+              </a:rPr>
+              <a:t>(Gives decent answers but doesn’t seem to use tools – probably has expansive </a:t>
+            </a:r>
+            <a:r>
+              <a:rPr lang="en-US" sz="1200">
+                <a:effectLst/>
+              </a:rPr>
+              <a:t>training data.)</a:t>
+            </a:r>
+            <a:endParaRPr lang="en-US" sz="1200" b="1" dirty="0">
+              <a:effectLst/>
+            </a:endParaRPr>
           </a:p>
           <a:p>
             <a:pPr lvl="1">
@@ -5376,9 +5385,6 @@
             </a:pPr>
             <a:r>
               <a:rPr lang="en-US" sz="1200" b="0" dirty="0">
-                <a:solidFill>
-                  <a:srgbClr val="FF0000"/>
-                </a:solidFill>
                 <a:effectLst/>
                 <a:latin typeface="Consolas" panose="020B0609020204030204" pitchFamily="49" charset="0"/>
               </a:rPr>

--- a/ToxPipe API Guide.pptx
+++ b/ToxPipe API Guide.pptx
@@ -4880,7 +4880,7 @@
         <p:spPr>
           <a:xfrm>
             <a:off x="838200" y="1473868"/>
-            <a:ext cx="10515600" cy="5119437"/>
+            <a:ext cx="10515600" cy="5227721"/>
           </a:xfrm>
         </p:spPr>
         <p:txBody>
@@ -4901,11 +4901,11 @@
             <a:r>
               <a:rPr lang="en-US" sz="1200" b="1" dirty="0">
                 <a:solidFill>
-                  <a:srgbClr val="FF0000"/>
+                  <a:srgbClr val="00B050"/>
                 </a:solidFill>
                 <a:effectLst/>
               </a:rPr>
-              <a:t>Red</a:t>
+              <a:t>Green</a:t>
             </a:r>
             <a:r>
               <a:rPr lang="en-US" sz="1200" b="1" dirty="0">
@@ -4917,8 +4917,66 @@
               <a:rPr lang="en-US" sz="1200" dirty="0">
                 <a:effectLst/>
               </a:rPr>
-              <a:t>= recommended, tested with tools</a:t>
-            </a:r>
+              <a:t>= Recommended, tested with tools.</a:t>
+            </a:r>
+          </a:p>
+          <a:p>
+            <a:pPr marL="0" indent="0">
+              <a:lnSpc>
+                <a:spcPct val="100000"/>
+              </a:lnSpc>
+              <a:spcBef>
+                <a:spcPts val="0"/>
+              </a:spcBef>
+              <a:buNone/>
+            </a:pPr>
+            <a:r>
+              <a:rPr lang="en-US" sz="1200" b="1" dirty="0">
+                <a:solidFill>
+                  <a:schemeClr val="accent4">
+                    <a:lumMod val="75000"/>
+                  </a:schemeClr>
+                </a:solidFill>
+              </a:rPr>
+              <a:t>Yellow</a:t>
+            </a:r>
+            <a:r>
+              <a:rPr lang="en-US" sz="1200" dirty="0"/>
+              <a:t> = Supported, can use tools but may fail to take proper thought chains. May require multiple repeat queries to get a satisfactory answer,</a:t>
+            </a:r>
+          </a:p>
+          <a:p>
+            <a:pPr marL="0" indent="0">
+              <a:lnSpc>
+                <a:spcPct val="100000"/>
+              </a:lnSpc>
+              <a:spcBef>
+                <a:spcPts val="0"/>
+              </a:spcBef>
+              <a:buNone/>
+            </a:pPr>
+            <a:r>
+              <a:rPr lang="en-US" sz="1200" b="1" dirty="0">
+                <a:solidFill>
+                  <a:srgbClr val="C00000"/>
+                </a:solidFill>
+                <a:effectLst/>
+              </a:rPr>
+              <a:t>Red</a:t>
+            </a:r>
+            <a:r>
+              <a:rPr lang="en-US" sz="1200" dirty="0">
+                <a:effectLst/>
+              </a:rPr>
+              <a:t> = Unsupported, </a:t>
+            </a:r>
+            <a:r>
+              <a:rPr lang="en-US" sz="1200" dirty="0"/>
+              <a:t>may be used but will not properly use tools. These models either hallucinate or rely on training data.</a:t>
+            </a:r>
+            <a:endParaRPr lang="en-US" sz="1200" dirty="0">
+              <a:effectLst/>
+            </a:endParaRPr>
           </a:p>
           <a:p>
             <a:pPr>
@@ -4947,7 +5005,10 @@
               </a:spcBef>
             </a:pPr>
             <a:r>
-              <a:rPr lang="en-US" sz="1200" b="0" dirty="0">
+              <a:rPr lang="en-US" sz="1200" b="1" dirty="0">
+                <a:solidFill>
+                  <a:srgbClr val="00B050"/>
+                </a:solidFill>
                 <a:effectLst/>
                 <a:latin typeface="Consolas" panose="020B0609020204030204" pitchFamily="49" charset="0"/>
               </a:rPr>
@@ -4964,7 +5025,10 @@
               </a:spcBef>
             </a:pPr>
             <a:r>
-              <a:rPr lang="en-US" sz="1200" b="0" dirty="0">
+              <a:rPr lang="en-US" sz="1200" b="1" dirty="0">
+                <a:solidFill>
+                  <a:srgbClr val="C00000"/>
+                </a:solidFill>
                 <a:effectLst/>
                 <a:latin typeface="Consolas" panose="020B0609020204030204" pitchFamily="49" charset="0"/>
               </a:rPr>
@@ -4981,9 +5045,9 @@
               </a:spcBef>
             </a:pPr>
             <a:r>
-              <a:rPr lang="en-US" sz="1200" b="0" dirty="0">
-                <a:solidFill>
-                  <a:srgbClr val="FF0000"/>
+              <a:rPr lang="en-US" sz="1200" b="1" dirty="0">
+                <a:solidFill>
+                  <a:srgbClr val="00B050"/>
                 </a:solidFill>
                 <a:effectLst/>
                 <a:latin typeface="Consolas" panose="020B0609020204030204" pitchFamily="49" charset="0"/>
@@ -5001,9 +5065,9 @@
               </a:spcBef>
             </a:pPr>
             <a:r>
-              <a:rPr lang="en-US" sz="1200" b="0" dirty="0">
-                <a:solidFill>
-                  <a:srgbClr val="FF0000"/>
+              <a:rPr lang="en-US" sz="1200" b="1" dirty="0">
+                <a:solidFill>
+                  <a:srgbClr val="00B050"/>
                 </a:solidFill>
                 <a:effectLst/>
                 <a:latin typeface="Consolas" panose="020B0609020204030204" pitchFamily="49" charset="0"/>
@@ -5026,13 +5090,6 @@
               </a:rPr>
               <a:t>Meta</a:t>
             </a:r>
-            <a:r>
-              <a:rPr lang="en-US" sz="1200" b="0" dirty="0">
-                <a:effectLst/>
-              </a:rPr>
-              <a:t> (not fully supported – doesn’t work with tools)</a:t>
-            </a:r>
-            <a:endParaRPr lang="en-US" sz="1200" dirty="0"/>
           </a:p>
           <a:p>
             <a:pPr lvl="1">
@@ -5044,11 +5101,32 @@
               </a:spcBef>
             </a:pPr>
             <a:r>
-              <a:rPr lang="en-US" sz="1200" b="0" dirty="0">
+              <a:rPr lang="en-US" sz="1200" b="1" dirty="0">
+                <a:solidFill>
+                  <a:schemeClr val="accent4">
+                    <a:lumMod val="75000"/>
+                  </a:schemeClr>
+                </a:solidFill>
                 <a:effectLst/>
                 <a:latin typeface="Consolas" panose="020B0609020204030204" pitchFamily="49" charset="0"/>
               </a:rPr>
               <a:t>llama3-1-70b</a:t>
+            </a:r>
+          </a:p>
+          <a:p>
+            <a:pPr>
+              <a:lnSpc>
+                <a:spcPct val="100000"/>
+              </a:lnSpc>
+              <a:spcBef>
+                <a:spcPts val="0"/>
+              </a:spcBef>
+            </a:pPr>
+            <a:r>
+              <a:rPr lang="en-US" sz="1200" b="1" dirty="0">
+                <a:effectLst/>
+              </a:rPr>
+              <a:t>Azure OpenAI</a:t>
             </a:r>
           </a:p>
           <a:p>
@@ -5061,11 +5139,14 @@
               </a:spcBef>
             </a:pPr>
             <a:r>
-              <a:rPr lang="en-US" sz="1200" b="0" dirty="0">
+              <a:rPr lang="en-US" sz="1200" b="1" dirty="0">
+                <a:solidFill>
+                  <a:srgbClr val="00B050"/>
+                </a:solidFill>
                 <a:effectLst/>
                 <a:latin typeface="Consolas" panose="020B0609020204030204" pitchFamily="49" charset="0"/>
               </a:rPr>
-              <a:t>llama3-1-8b</a:t>
+              <a:t>azure-gpt-4o</a:t>
             </a:r>
           </a:p>
           <a:p>
@@ -5078,11 +5159,16 @@
               </a:spcBef>
             </a:pPr>
             <a:r>
-              <a:rPr lang="en-US" sz="1200" b="0" dirty="0">
+              <a:rPr lang="en-US" sz="1200" b="1" dirty="0">
+                <a:solidFill>
+                  <a:schemeClr val="accent4">
+                    <a:lumMod val="75000"/>
+                  </a:schemeClr>
+                </a:solidFill>
                 <a:effectLst/>
                 <a:latin typeface="Consolas" panose="020B0609020204030204" pitchFamily="49" charset="0"/>
               </a:rPr>
-              <a:t>openbiollm-llama3-70b</a:t>
+              <a:t>azure-gpt-3.5-turbo (cannot handle large/complex queries)</a:t>
             </a:r>
           </a:p>
           <a:p>
@@ -5095,11 +5181,76 @@
               </a:spcBef>
             </a:pPr>
             <a:r>
-              <a:rPr lang="en-US" sz="1200" b="0" dirty="0">
+              <a:rPr lang="en-US" sz="1200" b="1" dirty="0">
+                <a:solidFill>
+                  <a:schemeClr val="accent4">
+                    <a:lumMod val="75000"/>
+                  </a:schemeClr>
+                </a:solidFill>
                 <a:effectLst/>
                 <a:latin typeface="Consolas" panose="020B0609020204030204" pitchFamily="49" charset="0"/>
               </a:rPr>
-              <a:t>llama2-13b</a:t>
+              <a:t>azure-gpt-4o-mini (may need large number of max iterations)</a:t>
+            </a:r>
+          </a:p>
+          <a:p>
+            <a:pPr lvl="1">
+              <a:lnSpc>
+                <a:spcPct val="100000"/>
+              </a:lnSpc>
+              <a:spcBef>
+                <a:spcPts val="0"/>
+              </a:spcBef>
+            </a:pPr>
+            <a:r>
+              <a:rPr lang="en-US" sz="1200" b="1" dirty="0">
+                <a:solidFill>
+                  <a:srgbClr val="00B050"/>
+                </a:solidFill>
+                <a:effectLst/>
+                <a:latin typeface="Consolas" panose="020B0609020204030204" pitchFamily="49" charset="0"/>
+              </a:rPr>
+              <a:t>azure-gpt-3.5-turbo-16k</a:t>
+            </a:r>
+          </a:p>
+          <a:p>
+            <a:pPr lvl="1">
+              <a:lnSpc>
+                <a:spcPct val="100000"/>
+              </a:lnSpc>
+              <a:spcBef>
+                <a:spcPts val="0"/>
+              </a:spcBef>
+            </a:pPr>
+            <a:r>
+              <a:rPr lang="en-US" sz="1200" b="1" dirty="0">
+                <a:solidFill>
+                  <a:srgbClr val="00B050"/>
+                </a:solidFill>
+                <a:effectLst/>
+                <a:latin typeface="Consolas" panose="020B0609020204030204" pitchFamily="49" charset="0"/>
+              </a:rPr>
+              <a:t>azure-gpt-4-turbo-20240409</a:t>
+            </a:r>
+          </a:p>
+          <a:p>
+            <a:pPr lvl="1">
+              <a:lnSpc>
+                <a:spcPct val="100000"/>
+              </a:lnSpc>
+              <a:spcBef>
+                <a:spcPts val="0"/>
+              </a:spcBef>
+            </a:pPr>
+            <a:r>
+              <a:rPr lang="en-US" sz="1200" b="1" dirty="0">
+                <a:solidFill>
+                  <a:srgbClr val="00B050"/>
+                </a:solidFill>
+                <a:effectLst/>
+                <a:latin typeface="Consolas" panose="020B0609020204030204" pitchFamily="49" charset="0"/>
+              </a:rPr>
+              <a:t>azure-gpt-4</a:t>
             </a:r>
           </a:p>
           <a:p>
@@ -5112,17 +5263,14 @@
               </a:spcBef>
             </a:pPr>
             <a:r>
-              <a:rPr lang="en-US" sz="1200" b="1" dirty="0">
+              <a:rPr lang="en-US" sz="1200" b="1" dirty="0" err="1">
                 <a:effectLst/>
               </a:rPr>
-              <a:t>Azure OpenAI </a:t>
-            </a:r>
-            <a:r>
-              <a:rPr lang="en-US" sz="1200" b="0" dirty="0">
-                <a:effectLst/>
-              </a:rPr>
-              <a:t>(recommended)</a:t>
-            </a:r>
+              <a:t>MistralAI</a:t>
+            </a:r>
+            <a:endParaRPr lang="en-US" sz="1200" b="1" dirty="0">
+              <a:effectLst/>
+            </a:endParaRPr>
           </a:p>
           <a:p>
             <a:pPr lvl="1">
@@ -5134,14 +5282,16 @@
               </a:spcBef>
             </a:pPr>
             <a:r>
-              <a:rPr lang="en-US" sz="1200" b="0" dirty="0">
-                <a:solidFill>
-                  <a:srgbClr val="FF0000"/>
+              <a:rPr lang="en-US" sz="1200" b="1" dirty="0">
+                <a:solidFill>
+                  <a:schemeClr val="accent4">
+                    <a:lumMod val="75000"/>
+                  </a:schemeClr>
                 </a:solidFill>
                 <a:effectLst/>
                 <a:latin typeface="Consolas" panose="020B0609020204030204" pitchFamily="49" charset="0"/>
               </a:rPr>
-              <a:t>azure-gpt-4o</a:t>
+              <a:t>mistral-large-2</a:t>
             </a:r>
           </a:p>
           <a:p>
@@ -5154,14 +5304,14 @@
               </a:spcBef>
             </a:pPr>
             <a:r>
-              <a:rPr lang="en-US" sz="1200" b="0" dirty="0">
-                <a:solidFill>
-                  <a:srgbClr val="FF0000"/>
+              <a:rPr lang="en-US" sz="1200" b="1" dirty="0">
+                <a:solidFill>
+                  <a:srgbClr val="C00000"/>
                 </a:solidFill>
                 <a:effectLst/>
                 <a:latin typeface="Consolas" panose="020B0609020204030204" pitchFamily="49" charset="0"/>
               </a:rPr>
-              <a:t>azure-gpt-3.5-turbo</a:t>
+              <a:t>mistral-large</a:t>
             </a:r>
           </a:p>
           <a:p>
@@ -5174,14 +5324,14 @@
               </a:spcBef>
             </a:pPr>
             <a:r>
-              <a:rPr lang="en-US" sz="1200" b="0" dirty="0">
-                <a:solidFill>
-                  <a:srgbClr val="FF0000"/>
+              <a:rPr lang="en-US" sz="1200" b="1" dirty="0">
+                <a:solidFill>
+                  <a:srgbClr val="C00000"/>
                 </a:solidFill>
                 <a:effectLst/>
                 <a:latin typeface="Consolas" panose="020B0609020204030204" pitchFamily="49" charset="0"/>
               </a:rPr>
-              <a:t>azure-gpt-4o-mini</a:t>
+              <a:t>mistral-7b-instruct</a:t>
             </a:r>
           </a:p>
           <a:p>
@@ -5194,14 +5344,32 @@
               </a:spcBef>
             </a:pPr>
             <a:r>
-              <a:rPr lang="en-US" sz="1200" b="0" dirty="0">
-                <a:solidFill>
-                  <a:srgbClr val="FF0000"/>
+              <a:rPr lang="en-US" sz="1200" b="1" dirty="0">
+                <a:solidFill>
+                  <a:schemeClr val="accent4">
+                    <a:lumMod val="75000"/>
+                  </a:schemeClr>
                 </a:solidFill>
                 <a:effectLst/>
                 <a:latin typeface="Consolas" panose="020B0609020204030204" pitchFamily="49" charset="0"/>
               </a:rPr>
-              <a:t>azure-gpt-3.5-turbo-16k</a:t>
+              <a:t>mixtral-8x7b-instruct</a:t>
+            </a:r>
+          </a:p>
+          <a:p>
+            <a:pPr>
+              <a:lnSpc>
+                <a:spcPct val="100000"/>
+              </a:lnSpc>
+              <a:spcBef>
+                <a:spcPts val="0"/>
+              </a:spcBef>
+            </a:pPr>
+            <a:r>
+              <a:rPr lang="en-US" sz="1200" b="1" dirty="0">
+                <a:effectLst/>
+              </a:rPr>
+              <a:t>Amazon</a:t>
             </a:r>
           </a:p>
           <a:p>
@@ -5214,14 +5382,30 @@
               </a:spcBef>
             </a:pPr>
             <a:r>
-              <a:rPr lang="en-US" sz="1200" b="0" dirty="0">
-                <a:solidFill>
-                  <a:srgbClr val="FF0000"/>
+              <a:rPr lang="en-US" sz="1200" b="1" dirty="0">
+                <a:solidFill>
+                  <a:srgbClr val="C00000"/>
                 </a:solidFill>
                 <a:effectLst/>
                 <a:latin typeface="Consolas" panose="020B0609020204030204" pitchFamily="49" charset="0"/>
               </a:rPr>
-              <a:t>azure-gpt-4-turbo-20240409</a:t>
+              <a:t>amazon-titan-text-premier</a:t>
+            </a:r>
+          </a:p>
+          <a:p>
+            <a:pPr>
+              <a:lnSpc>
+                <a:spcPct val="100000"/>
+              </a:lnSpc>
+              <a:spcBef>
+                <a:spcPts val="0"/>
+              </a:spcBef>
+            </a:pPr>
+            <a:r>
+              <a:rPr lang="en-US" sz="1200" b="1" dirty="0">
+                <a:effectLst/>
+              </a:rPr>
+              <a:t>Cohere</a:t>
             </a:r>
           </a:p>
           <a:p>
@@ -5234,202 +5418,28 @@
               </a:spcBef>
             </a:pPr>
             <a:r>
-              <a:rPr lang="en-US" sz="1200" b="0" dirty="0">
-                <a:solidFill>
-                  <a:srgbClr val="FF0000"/>
+              <a:rPr lang="en-US" sz="1200" b="1" dirty="0">
+                <a:solidFill>
+                  <a:srgbClr val="C00000"/>
                 </a:solidFill>
                 <a:effectLst/>
                 <a:latin typeface="Consolas" panose="020B0609020204030204" pitchFamily="49" charset="0"/>
               </a:rPr>
-              <a:t>azure-gpt-4</a:t>
-            </a:r>
-          </a:p>
-          <a:p>
-            <a:pPr>
-              <a:lnSpc>
-                <a:spcPct val="100000"/>
-              </a:lnSpc>
-              <a:spcBef>
-                <a:spcPts val="0"/>
-              </a:spcBef>
-            </a:pPr>
-            <a:r>
-              <a:rPr lang="en-US" sz="1200" b="1" dirty="0" err="1">
-                <a:effectLst/>
-              </a:rPr>
-              <a:t>MistralAI</a:t>
-            </a:r>
-            <a:r>
-              <a:rPr lang="en-US" sz="1200" b="1" dirty="0">
-                <a:effectLst/>
-              </a:rPr>
-              <a:t> </a:t>
-            </a:r>
-            <a:r>
+              <a:t>cohere-command-r-plus</a:t>
+            </a:r>
+            <a:br>
               <a:rPr lang="en-US" sz="1200" b="0" dirty="0">
-                <a:effectLst/>
-              </a:rPr>
-              <a:t>(not fully supported – tools occasionally work, but the models are prone to hallucination. These may also fail to take multiple agentic steps.)</a:t>
-            </a:r>
-            <a:endParaRPr lang="en-US" sz="1200" b="1" dirty="0">
-              <a:effectLst/>
-            </a:endParaRPr>
-          </a:p>
-          <a:p>
-            <a:pPr lvl="1">
-              <a:lnSpc>
-                <a:spcPct val="100000"/>
-              </a:lnSpc>
-              <a:spcBef>
-                <a:spcPts val="0"/>
-              </a:spcBef>
-            </a:pPr>
-            <a:r>
-              <a:rPr lang="en-US" sz="1200" b="0" dirty="0">
+                <a:solidFill>
+                  <a:srgbClr val="C00000"/>
+                </a:solidFill>
                 <a:effectLst/>
                 <a:latin typeface="Consolas" panose="020B0609020204030204" pitchFamily="49" charset="0"/>
               </a:rPr>
-              <a:t>mistral-large-2</a:t>
-            </a:r>
-          </a:p>
-          <a:p>
-            <a:pPr lvl="1">
-              <a:lnSpc>
-                <a:spcPct val="100000"/>
-              </a:lnSpc>
-              <a:spcBef>
-                <a:spcPts val="0"/>
-              </a:spcBef>
-            </a:pPr>
-            <a:r>
-              <a:rPr lang="en-US" sz="1200" b="0" dirty="0">
-                <a:effectLst/>
-                <a:latin typeface="Consolas" panose="020B0609020204030204" pitchFamily="49" charset="0"/>
-              </a:rPr>
-              <a:t>mistral-large</a:t>
-            </a:r>
-          </a:p>
-          <a:p>
-            <a:pPr lvl="1">
-              <a:lnSpc>
-                <a:spcPct val="100000"/>
-              </a:lnSpc>
-              <a:spcBef>
-                <a:spcPts val="0"/>
-              </a:spcBef>
-            </a:pPr>
-            <a:r>
-              <a:rPr lang="en-US" sz="1200" b="0" dirty="0">
-                <a:effectLst/>
-                <a:latin typeface="Consolas" panose="020B0609020204030204" pitchFamily="49" charset="0"/>
-              </a:rPr>
-              <a:t>mistral-7b-instruct</a:t>
-            </a:r>
-          </a:p>
-          <a:p>
-            <a:pPr lvl="1">
-              <a:lnSpc>
-                <a:spcPct val="100000"/>
-              </a:lnSpc>
-              <a:spcBef>
-                <a:spcPts val="0"/>
-              </a:spcBef>
-            </a:pPr>
-            <a:r>
-              <a:rPr lang="en-US" sz="1200" b="0" dirty="0">
-                <a:effectLst/>
-                <a:latin typeface="Consolas" panose="020B0609020204030204" pitchFamily="49" charset="0"/>
-              </a:rPr>
-              <a:t>mixtral-8x7b-instruct</a:t>
-            </a:r>
-          </a:p>
-          <a:p>
-            <a:pPr>
-              <a:lnSpc>
-                <a:spcPct val="100000"/>
-              </a:lnSpc>
-              <a:spcBef>
-                <a:spcPts val="0"/>
-              </a:spcBef>
-            </a:pPr>
-            <a:r>
-              <a:rPr lang="en-US" sz="1200" b="1" dirty="0">
-                <a:effectLst/>
-              </a:rPr>
-              <a:t>Amazon </a:t>
-            </a:r>
-            <a:r>
-              <a:rPr lang="en-US" sz="1200" dirty="0">
-                <a:effectLst/>
-              </a:rPr>
-              <a:t>(Gives decent answers but doesn’t seem to use tools – probably has expansive </a:t>
-            </a:r>
-            <a:r>
-              <a:rPr lang="en-US" sz="1200">
-                <a:effectLst/>
-              </a:rPr>
-              <a:t>training data.)</a:t>
-            </a:r>
-            <a:endParaRPr lang="en-US" sz="1200" b="1" dirty="0">
-              <a:effectLst/>
-            </a:endParaRPr>
-          </a:p>
-          <a:p>
-            <a:pPr lvl="1">
-              <a:lnSpc>
-                <a:spcPct val="100000"/>
-              </a:lnSpc>
-              <a:spcBef>
-                <a:spcPts val="0"/>
-              </a:spcBef>
-            </a:pPr>
-            <a:r>
-              <a:rPr lang="en-US" sz="1200" b="0" dirty="0">
-                <a:effectLst/>
-                <a:latin typeface="Consolas" panose="020B0609020204030204" pitchFamily="49" charset="0"/>
-              </a:rPr>
-              <a:t>amazon-titan-text-premier</a:t>
-            </a:r>
-          </a:p>
-          <a:p>
-            <a:pPr>
-              <a:lnSpc>
-                <a:spcPct val="100000"/>
-              </a:lnSpc>
-              <a:spcBef>
-                <a:spcPts val="0"/>
-              </a:spcBef>
-            </a:pPr>
-            <a:r>
-              <a:rPr lang="en-US" sz="1200" b="1" dirty="0">
-                <a:effectLst/>
-              </a:rPr>
-              <a:t>Cohere</a:t>
-            </a:r>
-          </a:p>
-          <a:p>
-            <a:pPr lvl="1">
-              <a:lnSpc>
-                <a:spcPct val="100000"/>
-              </a:lnSpc>
-              <a:spcBef>
-                <a:spcPts val="0"/>
-              </a:spcBef>
-            </a:pPr>
-            <a:r>
-              <a:rPr lang="en-US" sz="1200" b="0" dirty="0">
-                <a:effectLst/>
-                <a:latin typeface="Consolas" panose="020B0609020204030204" pitchFamily="49" charset="0"/>
-              </a:rPr>
-              <a:t>cohere-command-r-plus</a:t>
-            </a:r>
-            <a:br>
-              <a:rPr lang="en-US" sz="1200" b="0" dirty="0">
-                <a:effectLst/>
-                <a:latin typeface="Consolas" panose="020B0609020204030204" pitchFamily="49" charset="0"/>
-              </a:rPr>
             </a:br>
             <a:endParaRPr lang="en-US" sz="1200" b="0" dirty="0">
+              <a:solidFill>
+                <a:srgbClr val="C00000"/>
+              </a:solidFill>
               <a:effectLst/>
               <a:latin typeface="Consolas" panose="020B0609020204030204" pitchFamily="49" charset="0"/>
             </a:endParaRPr>

--- a/ToxPipe API Guide.pptx
+++ b/ToxPipe API Guide.pptx
@@ -268,7 +268,7 @@
           <a:p>
             <a:fld id="{2887AE02-B111-4481-B2BD-B82CAADB2540}" type="datetimeFigureOut">
               <a:rPr lang="en-US" smtClean="0"/>
-              <a:t>12/12/2024</a:t>
+              <a:t>2/27/2025</a:t>
             </a:fld>
             <a:endParaRPr lang="en-US"/>
           </a:p>
@@ -466,7 +466,7 @@
           <a:p>
             <a:fld id="{2887AE02-B111-4481-B2BD-B82CAADB2540}" type="datetimeFigureOut">
               <a:rPr lang="en-US" smtClean="0"/>
-              <a:t>12/12/2024</a:t>
+              <a:t>2/27/2025</a:t>
             </a:fld>
             <a:endParaRPr lang="en-US"/>
           </a:p>
@@ -674,7 +674,7 @@
           <a:p>
             <a:fld id="{2887AE02-B111-4481-B2BD-B82CAADB2540}" type="datetimeFigureOut">
               <a:rPr lang="en-US" smtClean="0"/>
-              <a:t>12/12/2024</a:t>
+              <a:t>2/27/2025</a:t>
             </a:fld>
             <a:endParaRPr lang="en-US"/>
           </a:p>
@@ -872,7 +872,7 @@
           <a:p>
             <a:fld id="{2887AE02-B111-4481-B2BD-B82CAADB2540}" type="datetimeFigureOut">
               <a:rPr lang="en-US" smtClean="0"/>
-              <a:t>12/12/2024</a:t>
+              <a:t>2/27/2025</a:t>
             </a:fld>
             <a:endParaRPr lang="en-US"/>
           </a:p>
@@ -1147,7 +1147,7 @@
           <a:p>
             <a:fld id="{2887AE02-B111-4481-B2BD-B82CAADB2540}" type="datetimeFigureOut">
               <a:rPr lang="en-US" smtClean="0"/>
-              <a:t>12/12/2024</a:t>
+              <a:t>2/27/2025</a:t>
             </a:fld>
             <a:endParaRPr lang="en-US"/>
           </a:p>
@@ -1412,7 +1412,7 @@
           <a:p>
             <a:fld id="{2887AE02-B111-4481-B2BD-B82CAADB2540}" type="datetimeFigureOut">
               <a:rPr lang="en-US" smtClean="0"/>
-              <a:t>12/12/2024</a:t>
+              <a:t>2/27/2025</a:t>
             </a:fld>
             <a:endParaRPr lang="en-US"/>
           </a:p>
@@ -1824,7 +1824,7 @@
           <a:p>
             <a:fld id="{2887AE02-B111-4481-B2BD-B82CAADB2540}" type="datetimeFigureOut">
               <a:rPr lang="en-US" smtClean="0"/>
-              <a:t>12/12/2024</a:t>
+              <a:t>2/27/2025</a:t>
             </a:fld>
             <a:endParaRPr lang="en-US"/>
           </a:p>
@@ -1965,7 +1965,7 @@
           <a:p>
             <a:fld id="{2887AE02-B111-4481-B2BD-B82CAADB2540}" type="datetimeFigureOut">
               <a:rPr lang="en-US" smtClean="0"/>
-              <a:t>12/12/2024</a:t>
+              <a:t>2/27/2025</a:t>
             </a:fld>
             <a:endParaRPr lang="en-US"/>
           </a:p>
@@ -2078,7 +2078,7 @@
           <a:p>
             <a:fld id="{2887AE02-B111-4481-B2BD-B82CAADB2540}" type="datetimeFigureOut">
               <a:rPr lang="en-US" smtClean="0"/>
-              <a:t>12/12/2024</a:t>
+              <a:t>2/27/2025</a:t>
             </a:fld>
             <a:endParaRPr lang="en-US"/>
           </a:p>
@@ -2389,7 +2389,7 @@
           <a:p>
             <a:fld id="{2887AE02-B111-4481-B2BD-B82CAADB2540}" type="datetimeFigureOut">
               <a:rPr lang="en-US" smtClean="0"/>
-              <a:t>12/12/2024</a:t>
+              <a:t>2/27/2025</a:t>
             </a:fld>
             <a:endParaRPr lang="en-US"/>
           </a:p>
@@ -2677,7 +2677,7 @@
           <a:p>
             <a:fld id="{2887AE02-B111-4481-B2BD-B82CAADB2540}" type="datetimeFigureOut">
               <a:rPr lang="en-US" smtClean="0"/>
-              <a:t>12/12/2024</a:t>
+              <a:t>2/27/2025</a:t>
             </a:fld>
             <a:endParaRPr lang="en-US"/>
           </a:p>
@@ -2918,7 +2918,7 @@
           <a:p>
             <a:fld id="{2887AE02-B111-4481-B2BD-B82CAADB2540}" type="datetimeFigureOut">
               <a:rPr lang="en-US" smtClean="0"/>
-              <a:t>12/12/2024</a:t>
+              <a:t>2/27/2025</a:t>
             </a:fld>
             <a:endParaRPr lang="en-US"/>
           </a:p>
@@ -4917,7 +4917,17 @@
               <a:rPr lang="en-US" sz="1200" dirty="0">
                 <a:effectLst/>
               </a:rPr>
-              <a:t>= Recommended, tested with tools.</a:t>
+              <a:t>= Recommended, </a:t>
+            </a:r>
+            <a:r>
+              <a:rPr lang="en-US" sz="1200" dirty="0"/>
+              <a:t>confirmed working</a:t>
+            </a:r>
+            <a:r>
+              <a:rPr lang="en-US" sz="1200" dirty="0">
+                <a:effectLst/>
+              </a:rPr>
+              <a:t> with tools.</a:t>
             </a:r>
           </a:p>
           <a:p>
@@ -4942,7 +4952,7 @@
             </a:r>
             <a:r>
               <a:rPr lang="en-US" sz="1200" dirty="0"/>
-              <a:t> = Supported, can use tools but may fail to take proper thought chains. May require multiple repeat queries to get a satisfactory answer,</a:t>
+              <a:t> = Partially supported, can use tools but may fail to take proper thought chains. May require multiple repeat queries to get a satisfactory answer.</a:t>
             </a:r>
           </a:p>
           <a:p>
@@ -5139,15 +5149,21 @@
               </a:spcBef>
             </a:pPr>
             <a:r>
-              <a:rPr lang="en-US" sz="1200" b="1" dirty="0">
+              <a:rPr lang="en-US" sz="1200" b="1">
                 <a:solidFill>
                   <a:srgbClr val="00B050"/>
                 </a:solidFill>
-                <a:effectLst/>
                 <a:latin typeface="Consolas" panose="020B0609020204030204" pitchFamily="49" charset="0"/>
               </a:rPr>
-              <a:t>azure-gpt-4o</a:t>
-            </a:r>
+              <a:t>azure-o3-mini</a:t>
+            </a:r>
+            <a:endParaRPr lang="en-US" sz="1200" b="1">
+              <a:solidFill>
+                <a:srgbClr val="00B050"/>
+              </a:solidFill>
+              <a:effectLst/>
+              <a:latin typeface="Consolas" panose="020B0609020204030204" pitchFamily="49" charset="0"/>
+            </a:endParaRPr>
           </a:p>
           <a:p>
             <a:pPr lvl="1">
@@ -5161,14 +5177,12 @@
             <a:r>
               <a:rPr lang="en-US" sz="1200" b="1" dirty="0">
                 <a:solidFill>
-                  <a:schemeClr val="accent4">
-                    <a:lumMod val="75000"/>
-                  </a:schemeClr>
+                  <a:srgbClr val="00B050"/>
                 </a:solidFill>
                 <a:effectLst/>
                 <a:latin typeface="Consolas" panose="020B0609020204030204" pitchFamily="49" charset="0"/>
               </a:rPr>
-              <a:t>azure-gpt-3.5-turbo (cannot handle large/complex queries)</a:t>
+              <a:t>azure-o1</a:t>
             </a:r>
           </a:p>
           <a:p>
@@ -5183,15 +5197,19 @@
             <a:r>
               <a:rPr lang="en-US" sz="1200" b="1" dirty="0">
                 <a:solidFill>
-                  <a:schemeClr val="accent4">
-                    <a:lumMod val="75000"/>
-                  </a:schemeClr>
-                </a:solidFill>
-                <a:effectLst/>
+                  <a:srgbClr val="00B050"/>
+                </a:solidFill>
                 <a:latin typeface="Consolas" panose="020B0609020204030204" pitchFamily="49" charset="0"/>
               </a:rPr>
-              <a:t>azure-gpt-4o-mini (may need large number of max iterations)</a:t>
-            </a:r>
+              <a:t>azure-o1-mini</a:t>
+            </a:r>
+            <a:endParaRPr lang="en-US" sz="1200" b="1" dirty="0">
+              <a:solidFill>
+                <a:srgbClr val="00B050"/>
+              </a:solidFill>
+              <a:effectLst/>
+              <a:latin typeface="Consolas" panose="020B0609020204030204" pitchFamily="49" charset="0"/>
+            </a:endParaRPr>
           </a:p>
           <a:p>
             <a:pPr lvl="1">
@@ -5210,7 +5228,7 @@
                 <a:effectLst/>
                 <a:latin typeface="Consolas" panose="020B0609020204030204" pitchFamily="49" charset="0"/>
               </a:rPr>
-              <a:t>azure-gpt-3.5-turbo-16k</a:t>
+              <a:t>azure-gpt-4o</a:t>
             </a:r>
           </a:p>
           <a:p>
@@ -5225,12 +5243,14 @@
             <a:r>
               <a:rPr lang="en-US" sz="1200" b="1" dirty="0">
                 <a:solidFill>
-                  <a:srgbClr val="00B050"/>
+                  <a:schemeClr val="accent4">
+                    <a:lumMod val="75000"/>
+                  </a:schemeClr>
                 </a:solidFill>
                 <a:effectLst/>
                 <a:latin typeface="Consolas" panose="020B0609020204030204" pitchFamily="49" charset="0"/>
               </a:rPr>
-              <a:t>azure-gpt-4-turbo-20240409</a:t>
+              <a:t>azure-gpt-4o-mini (may need large number of max iterations)</a:t>
             </a:r>
           </a:p>
           <a:p>
@@ -5251,6 +5271,68 @@
                 <a:latin typeface="Consolas" panose="020B0609020204030204" pitchFamily="49" charset="0"/>
               </a:rPr>
               <a:t>azure-gpt-4</a:t>
+            </a:r>
+          </a:p>
+          <a:p>
+            <a:pPr lvl="1">
+              <a:lnSpc>
+                <a:spcPct val="100000"/>
+              </a:lnSpc>
+              <a:spcBef>
+                <a:spcPts val="0"/>
+              </a:spcBef>
+            </a:pPr>
+            <a:r>
+              <a:rPr lang="en-US" sz="1200" b="1" dirty="0">
+                <a:solidFill>
+                  <a:srgbClr val="00B050"/>
+                </a:solidFill>
+                <a:effectLst/>
+                <a:latin typeface="Consolas" panose="020B0609020204030204" pitchFamily="49" charset="0"/>
+              </a:rPr>
+              <a:t>azure-gpt-4-turbo-20240409</a:t>
+            </a:r>
+          </a:p>
+          <a:p>
+            <a:pPr lvl="1">
+              <a:lnSpc>
+                <a:spcPct val="100000"/>
+              </a:lnSpc>
+              <a:spcBef>
+                <a:spcPts val="0"/>
+              </a:spcBef>
+            </a:pPr>
+            <a:r>
+              <a:rPr lang="en-US" sz="1200" b="1" dirty="0">
+                <a:solidFill>
+                  <a:schemeClr val="accent4">
+                    <a:lumMod val="75000"/>
+                  </a:schemeClr>
+                </a:solidFill>
+                <a:effectLst/>
+                <a:latin typeface="Consolas" panose="020B0609020204030204" pitchFamily="49" charset="0"/>
+              </a:rPr>
+              <a:t>azure-gpt-3.5-turbo (cannot handle large/complex queries)</a:t>
+            </a:r>
+          </a:p>
+          <a:p>
+            <a:pPr lvl="1">
+              <a:lnSpc>
+                <a:spcPct val="100000"/>
+              </a:lnSpc>
+              <a:spcBef>
+                <a:spcPts val="0"/>
+              </a:spcBef>
+            </a:pPr>
+            <a:r>
+              <a:rPr lang="en-US" sz="1200" b="1" dirty="0">
+                <a:solidFill>
+                  <a:srgbClr val="00B050"/>
+                </a:solidFill>
+                <a:effectLst/>
+                <a:latin typeface="Consolas" panose="020B0609020204030204" pitchFamily="49" charset="0"/>
+              </a:rPr>
+              <a:t>azure-gpt-3.5-turbo-16k</a:t>
             </a:r>
           </a:p>
           <a:p>

--- a/ToxPipe API Guide.pptx
+++ b/ToxPipe API Guide.pptx
@@ -268,7 +268,7 @@
           <a:p>
             <a:fld id="{2887AE02-B111-4481-B2BD-B82CAADB2540}" type="datetimeFigureOut">
               <a:rPr lang="en-US" smtClean="0"/>
-              <a:t>2/27/2025</a:t>
+              <a:t>5/14/2025</a:t>
             </a:fld>
             <a:endParaRPr lang="en-US"/>
           </a:p>
@@ -466,7 +466,7 @@
           <a:p>
             <a:fld id="{2887AE02-B111-4481-B2BD-B82CAADB2540}" type="datetimeFigureOut">
               <a:rPr lang="en-US" smtClean="0"/>
-              <a:t>2/27/2025</a:t>
+              <a:t>5/14/2025</a:t>
             </a:fld>
             <a:endParaRPr lang="en-US"/>
           </a:p>
@@ -674,7 +674,7 @@
           <a:p>
             <a:fld id="{2887AE02-B111-4481-B2BD-B82CAADB2540}" type="datetimeFigureOut">
               <a:rPr lang="en-US" smtClean="0"/>
-              <a:t>2/27/2025</a:t>
+              <a:t>5/14/2025</a:t>
             </a:fld>
             <a:endParaRPr lang="en-US"/>
           </a:p>
@@ -872,7 +872,7 @@
           <a:p>
             <a:fld id="{2887AE02-B111-4481-B2BD-B82CAADB2540}" type="datetimeFigureOut">
               <a:rPr lang="en-US" smtClean="0"/>
-              <a:t>2/27/2025</a:t>
+              <a:t>5/14/2025</a:t>
             </a:fld>
             <a:endParaRPr lang="en-US"/>
           </a:p>
@@ -1147,7 +1147,7 @@
           <a:p>
             <a:fld id="{2887AE02-B111-4481-B2BD-B82CAADB2540}" type="datetimeFigureOut">
               <a:rPr lang="en-US" smtClean="0"/>
-              <a:t>2/27/2025</a:t>
+              <a:t>5/14/2025</a:t>
             </a:fld>
             <a:endParaRPr lang="en-US"/>
           </a:p>
@@ -1412,7 +1412,7 @@
           <a:p>
             <a:fld id="{2887AE02-B111-4481-B2BD-B82CAADB2540}" type="datetimeFigureOut">
               <a:rPr lang="en-US" smtClean="0"/>
-              <a:t>2/27/2025</a:t>
+              <a:t>5/14/2025</a:t>
             </a:fld>
             <a:endParaRPr lang="en-US"/>
           </a:p>
@@ -1824,7 +1824,7 @@
           <a:p>
             <a:fld id="{2887AE02-B111-4481-B2BD-B82CAADB2540}" type="datetimeFigureOut">
               <a:rPr lang="en-US" smtClean="0"/>
-              <a:t>2/27/2025</a:t>
+              <a:t>5/14/2025</a:t>
             </a:fld>
             <a:endParaRPr lang="en-US"/>
           </a:p>
@@ -1965,7 +1965,7 @@
           <a:p>
             <a:fld id="{2887AE02-B111-4481-B2BD-B82CAADB2540}" type="datetimeFigureOut">
               <a:rPr lang="en-US" smtClean="0"/>
-              <a:t>2/27/2025</a:t>
+              <a:t>5/14/2025</a:t>
             </a:fld>
             <a:endParaRPr lang="en-US"/>
           </a:p>
@@ -2078,7 +2078,7 @@
           <a:p>
             <a:fld id="{2887AE02-B111-4481-B2BD-B82CAADB2540}" type="datetimeFigureOut">
               <a:rPr lang="en-US" smtClean="0"/>
-              <a:t>2/27/2025</a:t>
+              <a:t>5/14/2025</a:t>
             </a:fld>
             <a:endParaRPr lang="en-US"/>
           </a:p>
@@ -2389,7 +2389,7 @@
           <a:p>
             <a:fld id="{2887AE02-B111-4481-B2BD-B82CAADB2540}" type="datetimeFigureOut">
               <a:rPr lang="en-US" smtClean="0"/>
-              <a:t>2/27/2025</a:t>
+              <a:t>5/14/2025</a:t>
             </a:fld>
             <a:endParaRPr lang="en-US"/>
           </a:p>
@@ -2677,7 +2677,7 @@
           <a:p>
             <a:fld id="{2887AE02-B111-4481-B2BD-B82CAADB2540}" type="datetimeFigureOut">
               <a:rPr lang="en-US" smtClean="0"/>
-              <a:t>2/27/2025</a:t>
+              <a:t>5/14/2025</a:t>
             </a:fld>
             <a:endParaRPr lang="en-US"/>
           </a:p>
@@ -2918,7 +2918,7 @@
           <a:p>
             <a:fld id="{2887AE02-B111-4481-B2BD-B82CAADB2540}" type="datetimeFigureOut">
               <a:rPr lang="en-US" smtClean="0"/>
-              <a:t>2/27/2025</a:t>
+              <a:t>5/14/2025</a:t>
             </a:fld>
             <a:endParaRPr lang="en-US"/>
           </a:p>
@@ -3390,8 +3390,21 @@
           <a:p>
             <a:r>
               <a:rPr lang="en-US" dirty="0"/>
-              <a:t>Last Updated: Dec. 12, 2024</a:t>
-            </a:r>
+              <a:t>Last Updated</a:t>
+            </a:r>
+            <a:r>
+              <a:rPr lang="en-US"/>
+              <a:t>: May </a:t>
+            </a:r>
+            <a:r>
+              <a:rPr lang="en-US" dirty="0"/>
+              <a:t>14</a:t>
+            </a:r>
+            <a:r>
+              <a:rPr lang="en-US"/>
+              <a:t>, 2025</a:t>
+            </a:r>
+            <a:endParaRPr lang="en-US" dirty="0"/>
           </a:p>
         </p:txBody>
       </p:sp>
@@ -4889,106 +4902,6 @@
           </a:bodyPr>
           <a:lstStyle/>
           <a:p>
-            <a:pPr marL="0" indent="0">
-              <a:lnSpc>
-                <a:spcPct val="100000"/>
-              </a:lnSpc>
-              <a:spcBef>
-                <a:spcPts val="0"/>
-              </a:spcBef>
-              <a:buNone/>
-            </a:pPr>
-            <a:r>
-              <a:rPr lang="en-US" sz="1200" b="1" dirty="0">
-                <a:solidFill>
-                  <a:srgbClr val="00B050"/>
-                </a:solidFill>
-                <a:effectLst/>
-              </a:rPr>
-              <a:t>Green</a:t>
-            </a:r>
-            <a:r>
-              <a:rPr lang="en-US" sz="1200" b="1" dirty="0">
-                <a:effectLst/>
-              </a:rPr>
-              <a:t> </a:t>
-            </a:r>
-            <a:r>
-              <a:rPr lang="en-US" sz="1200" dirty="0">
-                <a:effectLst/>
-              </a:rPr>
-              <a:t>= Recommended, </a:t>
-            </a:r>
-            <a:r>
-              <a:rPr lang="en-US" sz="1200" dirty="0"/>
-              <a:t>confirmed working</a:t>
-            </a:r>
-            <a:r>
-              <a:rPr lang="en-US" sz="1200" dirty="0">
-                <a:effectLst/>
-              </a:rPr>
-              <a:t> with tools.</a:t>
-            </a:r>
-          </a:p>
-          <a:p>
-            <a:pPr marL="0" indent="0">
-              <a:lnSpc>
-                <a:spcPct val="100000"/>
-              </a:lnSpc>
-              <a:spcBef>
-                <a:spcPts val="0"/>
-              </a:spcBef>
-              <a:buNone/>
-            </a:pPr>
-            <a:r>
-              <a:rPr lang="en-US" sz="1200" b="1" dirty="0">
-                <a:solidFill>
-                  <a:schemeClr val="accent4">
-                    <a:lumMod val="75000"/>
-                  </a:schemeClr>
-                </a:solidFill>
-              </a:rPr>
-              <a:t>Yellow</a:t>
-            </a:r>
-            <a:r>
-              <a:rPr lang="en-US" sz="1200" dirty="0"/>
-              <a:t> = Partially supported, can use tools but may fail to take proper thought chains. May require multiple repeat queries to get a satisfactory answer.</a:t>
-            </a:r>
-          </a:p>
-          <a:p>
-            <a:pPr marL="0" indent="0">
-              <a:lnSpc>
-                <a:spcPct val="100000"/>
-              </a:lnSpc>
-              <a:spcBef>
-                <a:spcPts val="0"/>
-              </a:spcBef>
-              <a:buNone/>
-            </a:pPr>
-            <a:r>
-              <a:rPr lang="en-US" sz="1200" b="1" dirty="0">
-                <a:solidFill>
-                  <a:srgbClr val="C00000"/>
-                </a:solidFill>
-                <a:effectLst/>
-              </a:rPr>
-              <a:t>Red</a:t>
-            </a:r>
-            <a:r>
-              <a:rPr lang="en-US" sz="1200" dirty="0">
-                <a:effectLst/>
-              </a:rPr>
-              <a:t> = Unsupported, </a:t>
-            </a:r>
-            <a:r>
-              <a:rPr lang="en-US" sz="1200" dirty="0"/>
-              <a:t>may be used but will not properly use tools. These models either hallucinate or rely on training data.</a:t>
-            </a:r>
-            <a:endParaRPr lang="en-US" sz="1200" dirty="0">
-              <a:effectLst/>
-            </a:endParaRPr>
-          </a:p>
-          <a:p>
             <a:pPr>
               <a:lnSpc>
                 <a:spcPct val="100000"/>
@@ -4998,92 +4911,21 @@
               </a:spcBef>
             </a:pPr>
             <a:r>
-              <a:rPr lang="en-US" sz="1200" b="1" dirty="0">
-                <a:effectLst/>
-              </a:rPr>
-              <a:t>Anthropic</a:t>
-            </a:r>
-            <a:endParaRPr lang="en-US" sz="1200" b="1" dirty="0"/>
-          </a:p>
-          <a:p>
-            <a:pPr lvl="1">
-              <a:lnSpc>
-                <a:spcPct val="100000"/>
-              </a:lnSpc>
-              <a:spcBef>
-                <a:spcPts val="0"/>
-              </a:spcBef>
-            </a:pPr>
-            <a:r>
-              <a:rPr lang="en-US" sz="1200" b="1" dirty="0">
+              <a:rPr lang="en-US" sz="1600" b="1" dirty="0">
                 <a:solidFill>
                   <a:srgbClr val="00B050"/>
                 </a:solidFill>
-                <a:effectLst/>
                 <a:latin typeface="Consolas" panose="020B0609020204030204" pitchFamily="49" charset="0"/>
               </a:rPr>
-              <a:t>claude-3-5-sonnet</a:t>
-            </a:r>
-          </a:p>
-          <a:p>
-            <a:pPr lvl="1">
-              <a:lnSpc>
-                <a:spcPct val="100000"/>
-              </a:lnSpc>
-              <a:spcBef>
-                <a:spcPts val="0"/>
-              </a:spcBef>
-            </a:pPr>
-            <a:r>
-              <a:rPr lang="en-US" sz="1200" b="1" dirty="0">
-                <a:solidFill>
-                  <a:srgbClr val="C00000"/>
-                </a:solidFill>
-                <a:effectLst/>
-                <a:latin typeface="Consolas" panose="020B0609020204030204" pitchFamily="49" charset="0"/>
-              </a:rPr>
-              <a:t>claude-3-sonnet</a:t>
-            </a:r>
-          </a:p>
-          <a:p>
-            <a:pPr lvl="1">
-              <a:lnSpc>
-                <a:spcPct val="100000"/>
-              </a:lnSpc>
-              <a:spcBef>
-                <a:spcPts val="0"/>
-              </a:spcBef>
-            </a:pPr>
-            <a:r>
-              <a:rPr lang="en-US" sz="1200" b="1" dirty="0">
-                <a:solidFill>
-                  <a:srgbClr val="00B050"/>
-                </a:solidFill>
-                <a:effectLst/>
-                <a:latin typeface="Consolas" panose="020B0609020204030204" pitchFamily="49" charset="0"/>
-              </a:rPr>
-              <a:t>claude-3-haiku</a:t>
-            </a:r>
-          </a:p>
-          <a:p>
-            <a:pPr lvl="1">
-              <a:lnSpc>
-                <a:spcPct val="100000"/>
-              </a:lnSpc>
-              <a:spcBef>
-                <a:spcPts val="0"/>
-              </a:spcBef>
-            </a:pPr>
-            <a:r>
-              <a:rPr lang="en-US" sz="1200" b="1" dirty="0">
-                <a:solidFill>
-                  <a:srgbClr val="00B050"/>
-                </a:solidFill>
-                <a:effectLst/>
-                <a:latin typeface="Consolas" panose="020B0609020204030204" pitchFamily="49" charset="0"/>
-              </a:rPr>
-              <a:t>claude-3-opus</a:t>
-            </a:r>
+              <a:t>azure-o3-mini</a:t>
+            </a:r>
+            <a:endParaRPr lang="en-US" sz="1600" b="1" dirty="0">
+              <a:solidFill>
+                <a:srgbClr val="00B050"/>
+              </a:solidFill>
+              <a:effectLst/>
+              <a:latin typeface="Consolas" panose="020B0609020204030204" pitchFamily="49" charset="0"/>
+            </a:endParaRPr>
           </a:p>
           <a:p>
             <a:pPr>
@@ -5095,32 +4937,14 @@
               </a:spcBef>
             </a:pPr>
             <a:r>
-              <a:rPr lang="en-US" sz="1200" b="1" dirty="0">
-                <a:effectLst/>
-              </a:rPr>
-              <a:t>Meta</a:t>
-            </a:r>
-          </a:p>
-          <a:p>
-            <a:pPr lvl="1">
-              <a:lnSpc>
-                <a:spcPct val="100000"/>
-              </a:lnSpc>
-              <a:spcBef>
-                <a:spcPts val="0"/>
-              </a:spcBef>
-            </a:pPr>
-            <a:r>
-              <a:rPr lang="en-US" sz="1200" b="1" dirty="0">
+              <a:rPr lang="en-US" sz="1600" b="1" dirty="0">
                 <a:solidFill>
-                  <a:schemeClr val="accent4">
-                    <a:lumMod val="75000"/>
-                  </a:schemeClr>
+                  <a:srgbClr val="00B050"/>
                 </a:solidFill>
                 <a:effectLst/>
                 <a:latin typeface="Consolas" panose="020B0609020204030204" pitchFamily="49" charset="0"/>
               </a:rPr>
-              <a:t>llama3-1-70b</a:t>
+              <a:t>azure-o3</a:t>
             </a:r>
           </a:p>
           <a:p>
@@ -5133,398 +4957,15 @@
               </a:spcBef>
             </a:pPr>
             <a:r>
-              <a:rPr lang="en-US" sz="1200" b="1" dirty="0">
-                <a:effectLst/>
-              </a:rPr>
-              <a:t>Azure OpenAI</a:t>
-            </a:r>
-          </a:p>
-          <a:p>
-            <a:pPr lvl="1">
-              <a:lnSpc>
-                <a:spcPct val="100000"/>
-              </a:lnSpc>
-              <a:spcBef>
-                <a:spcPts val="0"/>
-              </a:spcBef>
-            </a:pPr>
-            <a:r>
-              <a:rPr lang="en-US" sz="1200" b="1">
-                <a:solidFill>
-                  <a:srgbClr val="00B050"/>
-                </a:solidFill>
-                <a:latin typeface="Consolas" panose="020B0609020204030204" pitchFamily="49" charset="0"/>
-              </a:rPr>
-              <a:t>azure-o3-mini</a:t>
-            </a:r>
-            <a:endParaRPr lang="en-US" sz="1200" b="1">
-              <a:solidFill>
-                <a:srgbClr val="00B050"/>
-              </a:solidFill>
-              <a:effectLst/>
-              <a:latin typeface="Consolas" panose="020B0609020204030204" pitchFamily="49" charset="0"/>
-            </a:endParaRPr>
-          </a:p>
-          <a:p>
-            <a:pPr lvl="1">
-              <a:lnSpc>
-                <a:spcPct val="100000"/>
-              </a:lnSpc>
-              <a:spcBef>
-                <a:spcPts val="0"/>
-              </a:spcBef>
-            </a:pPr>
-            <a:r>
-              <a:rPr lang="en-US" sz="1200" b="1" dirty="0">
+              <a:rPr lang="en-US" sz="1600" b="1" dirty="0">
                 <a:solidFill>
                   <a:srgbClr val="00B050"/>
                 </a:solidFill>
                 <a:effectLst/>
                 <a:latin typeface="Consolas" panose="020B0609020204030204" pitchFamily="49" charset="0"/>
               </a:rPr>
-              <a:t>azure-o1</a:t>
-            </a:r>
-          </a:p>
-          <a:p>
-            <a:pPr lvl="1">
-              <a:lnSpc>
-                <a:spcPct val="100000"/>
-              </a:lnSpc>
-              <a:spcBef>
-                <a:spcPts val="0"/>
-              </a:spcBef>
-            </a:pPr>
-            <a:r>
-              <a:rPr lang="en-US" sz="1200" b="1" dirty="0">
-                <a:solidFill>
-                  <a:srgbClr val="00B050"/>
-                </a:solidFill>
-                <a:latin typeface="Consolas" panose="020B0609020204030204" pitchFamily="49" charset="0"/>
-              </a:rPr>
-              <a:t>azure-o1-mini</a:t>
-            </a:r>
-            <a:endParaRPr lang="en-US" sz="1200" b="1" dirty="0">
-              <a:solidFill>
-                <a:srgbClr val="00B050"/>
-              </a:solidFill>
-              <a:effectLst/>
-              <a:latin typeface="Consolas" panose="020B0609020204030204" pitchFamily="49" charset="0"/>
-            </a:endParaRPr>
-          </a:p>
-          <a:p>
-            <a:pPr lvl="1">
-              <a:lnSpc>
-                <a:spcPct val="100000"/>
-              </a:lnSpc>
-              <a:spcBef>
-                <a:spcPts val="0"/>
-              </a:spcBef>
-            </a:pPr>
-            <a:r>
-              <a:rPr lang="en-US" sz="1200" b="1" dirty="0">
-                <a:solidFill>
-                  <a:srgbClr val="00B050"/>
-                </a:solidFill>
-                <a:effectLst/>
-                <a:latin typeface="Consolas" panose="020B0609020204030204" pitchFamily="49" charset="0"/>
-              </a:rPr>
               <a:t>azure-gpt-4o</a:t>
             </a:r>
-          </a:p>
-          <a:p>
-            <a:pPr lvl="1">
-              <a:lnSpc>
-                <a:spcPct val="100000"/>
-              </a:lnSpc>
-              <a:spcBef>
-                <a:spcPts val="0"/>
-              </a:spcBef>
-            </a:pPr>
-            <a:r>
-              <a:rPr lang="en-US" sz="1200" b="1" dirty="0">
-                <a:solidFill>
-                  <a:schemeClr val="accent4">
-                    <a:lumMod val="75000"/>
-                  </a:schemeClr>
-                </a:solidFill>
-                <a:effectLst/>
-                <a:latin typeface="Consolas" panose="020B0609020204030204" pitchFamily="49" charset="0"/>
-              </a:rPr>
-              <a:t>azure-gpt-4o-mini (may need large number of max iterations)</a:t>
-            </a:r>
-          </a:p>
-          <a:p>
-            <a:pPr lvl="1">
-              <a:lnSpc>
-                <a:spcPct val="100000"/>
-              </a:lnSpc>
-              <a:spcBef>
-                <a:spcPts val="0"/>
-              </a:spcBef>
-            </a:pPr>
-            <a:r>
-              <a:rPr lang="en-US" sz="1200" b="1" dirty="0">
-                <a:solidFill>
-                  <a:srgbClr val="00B050"/>
-                </a:solidFill>
-                <a:effectLst/>
-                <a:latin typeface="Consolas" panose="020B0609020204030204" pitchFamily="49" charset="0"/>
-              </a:rPr>
-              <a:t>azure-gpt-4</a:t>
-            </a:r>
-          </a:p>
-          <a:p>
-            <a:pPr lvl="1">
-              <a:lnSpc>
-                <a:spcPct val="100000"/>
-              </a:lnSpc>
-              <a:spcBef>
-                <a:spcPts val="0"/>
-              </a:spcBef>
-            </a:pPr>
-            <a:r>
-              <a:rPr lang="en-US" sz="1200" b="1" dirty="0">
-                <a:solidFill>
-                  <a:srgbClr val="00B050"/>
-                </a:solidFill>
-                <a:effectLst/>
-                <a:latin typeface="Consolas" panose="020B0609020204030204" pitchFamily="49" charset="0"/>
-              </a:rPr>
-              <a:t>azure-gpt-4-turbo-20240409</a:t>
-            </a:r>
-          </a:p>
-          <a:p>
-            <a:pPr lvl="1">
-              <a:lnSpc>
-                <a:spcPct val="100000"/>
-              </a:lnSpc>
-              <a:spcBef>
-                <a:spcPts val="0"/>
-              </a:spcBef>
-            </a:pPr>
-            <a:r>
-              <a:rPr lang="en-US" sz="1200" b="1" dirty="0">
-                <a:solidFill>
-                  <a:schemeClr val="accent4">
-                    <a:lumMod val="75000"/>
-                  </a:schemeClr>
-                </a:solidFill>
-                <a:effectLst/>
-                <a:latin typeface="Consolas" panose="020B0609020204030204" pitchFamily="49" charset="0"/>
-              </a:rPr>
-              <a:t>azure-gpt-3.5-turbo (cannot handle large/complex queries)</a:t>
-            </a:r>
-          </a:p>
-          <a:p>
-            <a:pPr lvl="1">
-              <a:lnSpc>
-                <a:spcPct val="100000"/>
-              </a:lnSpc>
-              <a:spcBef>
-                <a:spcPts val="0"/>
-              </a:spcBef>
-            </a:pPr>
-            <a:r>
-              <a:rPr lang="en-US" sz="1200" b="1" dirty="0">
-                <a:solidFill>
-                  <a:srgbClr val="00B050"/>
-                </a:solidFill>
-                <a:effectLst/>
-                <a:latin typeface="Consolas" panose="020B0609020204030204" pitchFamily="49" charset="0"/>
-              </a:rPr>
-              <a:t>azure-gpt-3.5-turbo-16k</a:t>
-            </a:r>
-          </a:p>
-          <a:p>
-            <a:pPr>
-              <a:lnSpc>
-                <a:spcPct val="100000"/>
-              </a:lnSpc>
-              <a:spcBef>
-                <a:spcPts val="0"/>
-              </a:spcBef>
-            </a:pPr>
-            <a:r>
-              <a:rPr lang="en-US" sz="1200" b="1" dirty="0" err="1">
-                <a:effectLst/>
-              </a:rPr>
-              <a:t>MistralAI</a:t>
-            </a:r>
-            <a:endParaRPr lang="en-US" sz="1200" b="1" dirty="0">
-              <a:effectLst/>
-            </a:endParaRPr>
-          </a:p>
-          <a:p>
-            <a:pPr lvl="1">
-              <a:lnSpc>
-                <a:spcPct val="100000"/>
-              </a:lnSpc>
-              <a:spcBef>
-                <a:spcPts val="0"/>
-              </a:spcBef>
-            </a:pPr>
-            <a:r>
-              <a:rPr lang="en-US" sz="1200" b="1" dirty="0">
-                <a:solidFill>
-                  <a:schemeClr val="accent4">
-                    <a:lumMod val="75000"/>
-                  </a:schemeClr>
-                </a:solidFill>
-                <a:effectLst/>
-                <a:latin typeface="Consolas" panose="020B0609020204030204" pitchFamily="49" charset="0"/>
-              </a:rPr>
-              <a:t>mistral-large-2</a:t>
-            </a:r>
-          </a:p>
-          <a:p>
-            <a:pPr lvl="1">
-              <a:lnSpc>
-                <a:spcPct val="100000"/>
-              </a:lnSpc>
-              <a:spcBef>
-                <a:spcPts val="0"/>
-              </a:spcBef>
-            </a:pPr>
-            <a:r>
-              <a:rPr lang="en-US" sz="1200" b="1" dirty="0">
-                <a:solidFill>
-                  <a:srgbClr val="C00000"/>
-                </a:solidFill>
-                <a:effectLst/>
-                <a:latin typeface="Consolas" panose="020B0609020204030204" pitchFamily="49" charset="0"/>
-              </a:rPr>
-              <a:t>mistral-large</a:t>
-            </a:r>
-          </a:p>
-          <a:p>
-            <a:pPr lvl="1">
-              <a:lnSpc>
-                <a:spcPct val="100000"/>
-              </a:lnSpc>
-              <a:spcBef>
-                <a:spcPts val="0"/>
-              </a:spcBef>
-            </a:pPr>
-            <a:r>
-              <a:rPr lang="en-US" sz="1200" b="1" dirty="0">
-                <a:solidFill>
-                  <a:srgbClr val="C00000"/>
-                </a:solidFill>
-                <a:effectLst/>
-                <a:latin typeface="Consolas" panose="020B0609020204030204" pitchFamily="49" charset="0"/>
-              </a:rPr>
-              <a:t>mistral-7b-instruct</a:t>
-            </a:r>
-          </a:p>
-          <a:p>
-            <a:pPr lvl="1">
-              <a:lnSpc>
-                <a:spcPct val="100000"/>
-              </a:lnSpc>
-              <a:spcBef>
-                <a:spcPts val="0"/>
-              </a:spcBef>
-            </a:pPr>
-            <a:r>
-              <a:rPr lang="en-US" sz="1200" b="1" dirty="0">
-                <a:solidFill>
-                  <a:schemeClr val="accent4">
-                    <a:lumMod val="75000"/>
-                  </a:schemeClr>
-                </a:solidFill>
-                <a:effectLst/>
-                <a:latin typeface="Consolas" panose="020B0609020204030204" pitchFamily="49" charset="0"/>
-              </a:rPr>
-              <a:t>mixtral-8x7b-instruct</a:t>
-            </a:r>
-          </a:p>
-          <a:p>
-            <a:pPr>
-              <a:lnSpc>
-                <a:spcPct val="100000"/>
-              </a:lnSpc>
-              <a:spcBef>
-                <a:spcPts val="0"/>
-              </a:spcBef>
-            </a:pPr>
-            <a:r>
-              <a:rPr lang="en-US" sz="1200" b="1" dirty="0">
-                <a:effectLst/>
-              </a:rPr>
-              <a:t>Amazon</a:t>
-            </a:r>
-          </a:p>
-          <a:p>
-            <a:pPr lvl="1">
-              <a:lnSpc>
-                <a:spcPct val="100000"/>
-              </a:lnSpc>
-              <a:spcBef>
-                <a:spcPts val="0"/>
-              </a:spcBef>
-            </a:pPr>
-            <a:r>
-              <a:rPr lang="en-US" sz="1200" b="1" dirty="0">
-                <a:solidFill>
-                  <a:srgbClr val="C00000"/>
-                </a:solidFill>
-                <a:effectLst/>
-                <a:latin typeface="Consolas" panose="020B0609020204030204" pitchFamily="49" charset="0"/>
-              </a:rPr>
-              <a:t>amazon-titan-text-premier</a:t>
-            </a:r>
-          </a:p>
-          <a:p>
-            <a:pPr>
-              <a:lnSpc>
-                <a:spcPct val="100000"/>
-              </a:lnSpc>
-              <a:spcBef>
-                <a:spcPts val="0"/>
-              </a:spcBef>
-            </a:pPr>
-            <a:r>
-              <a:rPr lang="en-US" sz="1200" b="1" dirty="0">
-                <a:effectLst/>
-              </a:rPr>
-              <a:t>Cohere</a:t>
-            </a:r>
-          </a:p>
-          <a:p>
-            <a:pPr lvl="1">
-              <a:lnSpc>
-                <a:spcPct val="100000"/>
-              </a:lnSpc>
-              <a:spcBef>
-                <a:spcPts val="0"/>
-              </a:spcBef>
-            </a:pPr>
-            <a:r>
-              <a:rPr lang="en-US" sz="1200" b="1" dirty="0">
-                <a:solidFill>
-                  <a:srgbClr val="C00000"/>
-                </a:solidFill>
-                <a:effectLst/>
-                <a:latin typeface="Consolas" panose="020B0609020204030204" pitchFamily="49" charset="0"/>
-              </a:rPr>
-              <a:t>cohere-command-r-plus</a:t>
-            </a:r>
-            <a:br>
-              <a:rPr lang="en-US" sz="1200" b="0" dirty="0">
-                <a:solidFill>
-                  <a:srgbClr val="C00000"/>
-                </a:solidFill>
-                <a:effectLst/>
-                <a:latin typeface="Consolas" panose="020B0609020204030204" pitchFamily="49" charset="0"/>
-              </a:rPr>
-            </a:br>
-            <a:endParaRPr lang="en-US" sz="1200" b="0" dirty="0">
-              <a:solidFill>
-                <a:srgbClr val="C00000"/>
-              </a:solidFill>
-              <a:effectLst/>
-              <a:latin typeface="Consolas" panose="020B0609020204030204" pitchFamily="49" charset="0"/>
-            </a:endParaRPr>
           </a:p>
           <a:p>
             <a:pPr>
